--- a/week-6/proposal-presentation/wang-mark-proposal.pptx
+++ b/week-6/proposal-presentation/wang-mark-proposal.pptx
@@ -218,7 +218,7 @@
           <a:p>
             <a:fld id="{313A5E37-3A67-EE46-AE6F-745A0EEF17F3}" type="datetimeFigureOut">
               <a:rPr lang="en-US" smtClean="0"/>
-              <a:t>5/3/26</a:t>
+              <a:t>5/4/2026</a:t>
             </a:fld>
             <a:endParaRPr lang="en-US"/>
           </a:p>
@@ -525,7 +525,7 @@
           <a:p>
             <a:fld id="{12331DAD-76C8-D143-940A-1249F810C751}" type="datetime4">
               <a:rPr lang="en-US" smtClean="0"/>
-              <a:t>May 3, 2026</a:t>
+              <a:t>May 4, 2026</a:t>
             </a:fld>
             <a:endParaRPr lang="en-US" dirty="0"/>
           </a:p>
@@ -1669,7 +1669,7 @@
           <a:p>
             <a:fld id="{B9EB0CAB-07AA-2647-BE58-7A658EF3CBEE}" type="datetime4">
               <a:rPr lang="en-US" smtClean="0"/>
-              <a:t>May 3, 2026</a:t>
+              <a:t>May 4, 2026</a:t>
             </a:fld>
             <a:endParaRPr lang="en-US" dirty="0"/>
           </a:p>
@@ -2332,7 +2332,7 @@
           <a:p>
             <a:fld id="{8C78506B-CDED-764D-A072-FDCE7A00B000}" type="datetime4">
               <a:rPr lang="en-US" smtClean="0"/>
-              <a:t>May 3, 2026</a:t>
+              <a:t>May 4, 2026</a:t>
             </a:fld>
             <a:endParaRPr lang="en-US" dirty="0"/>
           </a:p>
@@ -3579,7 +3579,7 @@
           <a:p>
             <a:fld id="{92B87C6E-9F56-9A4E-BC38-C7FEA0F12D86}" type="datetime4">
               <a:rPr lang="en-US" smtClean="0"/>
-              <a:t>May 3, 2026</a:t>
+              <a:t>May 4, 2026</a:t>
             </a:fld>
             <a:endParaRPr lang="en-US" dirty="0"/>
           </a:p>
@@ -4100,7 +4100,7 @@
           <a:p>
             <a:fld id="{92B87C6E-9F56-9A4E-BC38-C7FEA0F12D86}" type="datetime4">
               <a:rPr lang="en-US" smtClean="0"/>
-              <a:t>May 3, 2026</a:t>
+              <a:t>May 4, 2026</a:t>
             </a:fld>
             <a:endParaRPr lang="en-US" dirty="0"/>
           </a:p>
@@ -4273,7 +4273,7 @@
           <a:p>
             <a:fld id="{5EFEDD32-F5EB-A741-9F8B-E23B8F80D24B}" type="datetime4">
               <a:rPr lang="en-US" smtClean="0"/>
-              <a:t>May 3, 2026</a:t>
+              <a:t>May 4, 2026</a:t>
             </a:fld>
             <a:endParaRPr lang="en-US" dirty="0"/>
           </a:p>
@@ -4896,7 +4896,7 @@
           <a:p>
             <a:fld id="{24D8B39A-01F2-FA4B-87F6-F02AC7945853}" type="datetime4">
               <a:rPr lang="en-US" smtClean="0"/>
-              <a:t>May 3, 2026</a:t>
+              <a:t>May 4, 2026</a:t>
             </a:fld>
             <a:endParaRPr lang="en-US" dirty="0"/>
           </a:p>
@@ -5493,7 +5493,7 @@
           <a:p>
             <a:fld id="{CD19E2CA-7A22-2A47-87A7-154317480B32}" type="datetime4">
               <a:rPr lang="en-US" smtClean="0"/>
-              <a:t>May 3, 2026</a:t>
+              <a:t>May 4, 2026</a:t>
             </a:fld>
             <a:endParaRPr lang="en-US" dirty="0"/>
           </a:p>
@@ -6355,7 +6355,7 @@
           <a:p>
             <a:fld id="{277AD0DB-988E-4E4A-9FF3-E2C69BC94326}" type="datetime4">
               <a:rPr lang="en-US" smtClean="0"/>
-              <a:t>May 3, 2026</a:t>
+              <a:t>May 4, 2026</a:t>
             </a:fld>
             <a:endParaRPr lang="en-US" dirty="0"/>
           </a:p>
@@ -7556,7 +7556,7 @@
           <a:p>
             <a:fld id="{FA6EA13E-D85D-234A-B454-2515B0E8FC3F}" type="datetime4">
               <a:rPr lang="en-US" smtClean="0"/>
-              <a:t>May 3, 2026</a:t>
+              <a:t>May 4, 2026</a:t>
             </a:fld>
             <a:endParaRPr lang="en-US" dirty="0"/>
           </a:p>
@@ -8305,7 +8305,7 @@
           <a:p>
             <a:fld id="{F7BF61F8-88B3-FE4F-8169-B5261E98FF9B}" type="datetime4">
               <a:rPr lang="en-US" smtClean="0"/>
-              <a:t>May 3, 2026</a:t>
+              <a:t>May 4, 2026</a:t>
             </a:fld>
             <a:endParaRPr lang="en-US" dirty="0"/>
           </a:p>
@@ -9089,7 +9089,7 @@
           <a:p>
             <a:fld id="{2E97A3B5-6613-4F46-BF76-6FADC2B102EA}" type="datetime4">
               <a:rPr lang="en-US" smtClean="0"/>
-              <a:t>May 3, 2026</a:t>
+              <a:t>May 4, 2026</a:t>
             </a:fld>
             <a:endParaRPr lang="en-US" dirty="0"/>
           </a:p>
@@ -9838,7 +9838,7 @@
           <a:p>
             <a:fld id="{09DCE2DB-E4F8-0848-90C1-ACDCE2F38AD9}" type="datetime4">
               <a:rPr lang="en-US" smtClean="0"/>
-              <a:t>May 3, 2026</a:t>
+              <a:t>May 4, 2026</a:t>
             </a:fld>
             <a:endParaRPr lang="en-US" dirty="0"/>
           </a:p>
@@ -10098,7 +10098,7 @@
           <a:p>
             <a:fld id="{11D0AFF7-781E-9C49-9DD3-A4DFB4A9395B}" type="datetime4">
               <a:rPr lang="en-US" smtClean="0"/>
-              <a:t>May 3, 2026</a:t>
+              <a:t>May 4, 2026</a:t>
             </a:fld>
             <a:endParaRPr lang="en-US" dirty="0"/>
           </a:p>
@@ -10896,7 +10896,7 @@
           <a:p>
             <a:fld id="{9FE47C0C-C9E7-AE4D-809E-5CBF13CABA9B}" type="datetime4">
               <a:rPr lang="en-US" smtClean="0"/>
-              <a:t>May 3, 2026</a:t>
+              <a:t>May 4, 2026</a:t>
             </a:fld>
             <a:endParaRPr lang="en-US" dirty="0"/>
           </a:p>
@@ -11681,7 +11681,7 @@
           <a:p>
             <a:fld id="{FE467E6B-9A71-6D40-8626-10A71C7AA91F}" type="datetime4">
               <a:rPr lang="en-US" smtClean="0"/>
-              <a:t>May 3, 2026</a:t>
+              <a:t>May 4, 2026</a:t>
             </a:fld>
             <a:endParaRPr lang="en-US" dirty="0"/>
           </a:p>
@@ -13950,7 +13950,7 @@
                 </a:solidFill>
               </a:rPr>
               <a:pPr/>
-              <a:t>May 3, 2026</a:t>
+              <a:t>May 4, 2026</a:t>
             </a:fld>
             <a:endParaRPr lang="en-US" dirty="0">
               <a:solidFill>
@@ -15043,7 +15043,7 @@
           <a:p>
             <a:fld id="{F7BF61F8-88B3-FE4F-8169-B5261E98FF9B}" type="datetime4">
               <a:rPr lang="en-US" smtClean="0"/>
-              <a:t>May 3, 2026</a:t>
+              <a:t>May 4, 2026</a:t>
             </a:fld>
             <a:endParaRPr lang="en-US" dirty="0"/>
           </a:p>
@@ -15228,7 +15228,7 @@
                   <a:spcPts val="600"/>
                 </a:spcAft>
               </a:pPr>
-              <a:t>May 3, 2026</a:t>
+              <a:t>May 4, 2026</a:t>
             </a:fld>
             <a:endParaRPr lang="en-US"/>
           </a:p>
@@ -15403,7 +15403,7 @@
           <a:p>
             <a:fld id="{92B87C6E-9F56-9A4E-BC38-C7FEA0F12D86}" type="datetime4">
               <a:rPr lang="en-US" smtClean="0"/>
-              <a:t>May 3, 2026</a:t>
+              <a:t>May 4, 2026</a:t>
             </a:fld>
             <a:endParaRPr lang="en-US" dirty="0"/>
           </a:p>
@@ -15469,10 +15469,10 @@
       </p:sp>
       <p:pic>
         <p:nvPicPr>
-          <p:cNvPr id="15" name="Picture 14">
+          <p:cNvPr id="6" name="Picture 5">
             <a:extLst>
               <a:ext uri="{FF2B5EF4-FFF2-40B4-BE49-F238E27FC236}">
-                <a16:creationId xmlns:a16="http://schemas.microsoft.com/office/drawing/2014/main" id="{573F59B7-95C1-6B12-5EF1-5EB481316E88}"/>
+                <a16:creationId xmlns:a16="http://schemas.microsoft.com/office/drawing/2014/main" id="{005C80C8-C2B4-C2DB-DEAA-2B712D38D357}"/>
               </a:ext>
             </a:extLst>
           </p:cNvPr>
@@ -15489,8 +15489,8 @@
         </p:blipFill>
         <p:spPr>
           <a:xfrm>
-            <a:off x="685800" y="1361574"/>
-            <a:ext cx="7772400" cy="2420352"/>
+            <a:off x="548640" y="1321166"/>
+            <a:ext cx="8046720" cy="2501168"/>
           </a:xfrm>
           <a:prstGeom prst="rect">
             <a:avLst/>
@@ -15550,7 +15550,7 @@
           <a:p>
             <a:fld id="{92B87C6E-9F56-9A4E-BC38-C7FEA0F12D86}" type="datetime4">
               <a:rPr lang="en-US" smtClean="0"/>
-              <a:t>May 3, 2026</a:t>
+              <a:t>May 4, 2026</a:t>
             </a:fld>
             <a:endParaRPr lang="en-US" dirty="0"/>
           </a:p>
@@ -15616,10 +15616,10 @@
       </p:sp>
       <p:pic>
         <p:nvPicPr>
-          <p:cNvPr id="9" name="Picture 8">
+          <p:cNvPr id="6" name="Picture 5">
             <a:extLst>
               <a:ext uri="{FF2B5EF4-FFF2-40B4-BE49-F238E27FC236}">
-                <a16:creationId xmlns:a16="http://schemas.microsoft.com/office/drawing/2014/main" id="{FC8A252D-4692-CB40-6F1A-64DD8EE28CD5}"/>
+                <a16:creationId xmlns:a16="http://schemas.microsoft.com/office/drawing/2014/main" id="{CE5FA279-E9E7-150A-6CF3-94D96F0CE814}"/>
               </a:ext>
             </a:extLst>
           </p:cNvPr>
@@ -15636,8 +15636,8 @@
         </p:blipFill>
         <p:spPr>
           <a:xfrm>
-            <a:off x="1972954" y="948262"/>
-            <a:ext cx="5198092" cy="3691323"/>
+            <a:off x="1861434" y="908552"/>
+            <a:ext cx="5421131" cy="3846328"/>
           </a:xfrm>
           <a:prstGeom prst="rect">
             <a:avLst/>
@@ -15697,7 +15697,7 @@
           <a:p>
             <a:fld id="{92B87C6E-9F56-9A4E-BC38-C7FEA0F12D86}" type="datetime4">
               <a:rPr lang="en-US" smtClean="0"/>
-              <a:t>May 3, 2026</a:t>
+              <a:t>May 4, 2026</a:t>
             </a:fld>
             <a:endParaRPr lang="en-US" dirty="0"/>
           </a:p>
@@ -15844,7 +15844,7 @@
           <a:p>
             <a:fld id="{CD19E2CA-7A22-2A47-87A7-154317480B32}" type="datetime4">
               <a:rPr lang="en-US" smtClean="0"/>
-              <a:t>May 3, 2026</a:t>
+              <a:t>May 4, 2026</a:t>
             </a:fld>
             <a:endParaRPr lang="en-US" dirty="0"/>
           </a:p>
